--- a/topic08-higher-order-functions/unit-08a-lectures/talk-3/c-zipWith.pptx
+++ b/topic08-higher-order-functions/unit-08a-lectures/talk-3/c-zipWith.pptx
@@ -524,10 +524,10 @@
           </a:ln>
           <a:extLst>
             <a:ext uri="{FAA26D3D-D897-4be2-8F04-BA451C77F1D7}">
-              <ma14:placeholderFlag xmlns="" xmlns:ma14="http://schemas.microsoft.com/office/mac/drawingml/2011/main" val="1"/>
+              <ma14:placeholderFlag xmlns:ma14="http://schemas.microsoft.com/office/mac/drawingml/2011/main" xmlns="" val="1"/>
             </a:ext>
             <a:ext uri="{909E8E84-426E-40dd-AFC4-6F175D3DCCD1}">
-              <a14:hiddenFill xmlns="" xmlns:a14="http://schemas.microsoft.com/office/drawing/2010/main">
+              <a14:hiddenFill xmlns:a14="http://schemas.microsoft.com/office/drawing/2010/main" xmlns="">
                 <a:solidFill>
                   <a:srgbClr val="FFFFFF"/>
                 </a:solidFill>
@@ -1109,7 +1109,7 @@
             <a:fld id="{08B9EBBA-996F-894A-B54A-D6246ED52CEA}" type="datetimeFigureOut">
               <a:rPr lang="en-US" smtClean="0"/>
               <a:pPr/>
-              <a:t>3/19/25</a:t>
+              <a:t>3/7/26</a:t>
             </a:fld>
             <a:endParaRPr lang="en-US" dirty="0"/>
           </a:p>
@@ -1531,7 +1531,7 @@
             <a:fld id="{09B482E8-6E0E-1B4F-B1FD-C69DB9E858D9}" type="datetimeFigureOut">
               <a:rPr lang="en-US" smtClean="0"/>
               <a:pPr/>
-              <a:t>3/19/25</a:t>
+              <a:t>3/7/26</a:t>
             </a:fld>
             <a:endParaRPr lang="en-US" dirty="0"/>
           </a:p>
@@ -1875,7 +1875,7 @@
             <a:fld id="{09B482E8-6E0E-1B4F-B1FD-C69DB9E858D9}" type="datetimeFigureOut">
               <a:rPr lang="en-US" smtClean="0"/>
               <a:pPr/>
-              <a:t>3/19/25</a:t>
+              <a:t>3/7/26</a:t>
             </a:fld>
             <a:endParaRPr lang="en-US" dirty="0"/>
           </a:p>
@@ -2288,7 +2288,7 @@
             <a:fld id="{09B482E8-6E0E-1B4F-B1FD-C69DB9E858D9}" type="datetimeFigureOut">
               <a:rPr lang="en-US" smtClean="0"/>
               <a:pPr/>
-              <a:t>3/19/25</a:t>
+              <a:t>3/7/26</a:t>
             </a:fld>
             <a:endParaRPr lang="en-US" dirty="0"/>
           </a:p>
@@ -2864,7 +2864,7 @@
             <a:fld id="{09B482E8-6E0E-1B4F-B1FD-C69DB9E858D9}" type="datetimeFigureOut">
               <a:rPr lang="en-US" smtClean="0"/>
               <a:pPr/>
-              <a:t>3/19/25</a:t>
+              <a:t>3/7/26</a:t>
             </a:fld>
             <a:endParaRPr lang="en-US" dirty="0"/>
           </a:p>
@@ -3553,7 +3553,7 @@
             <a:fld id="{09B482E8-6E0E-1B4F-B1FD-C69DB9E858D9}" type="datetimeFigureOut">
               <a:rPr lang="en-US" smtClean="0"/>
               <a:pPr/>
-              <a:t>3/19/25</a:t>
+              <a:t>3/7/26</a:t>
             </a:fld>
             <a:endParaRPr lang="en-US" dirty="0"/>
           </a:p>
@@ -4474,7 +4474,7 @@
             <a:fld id="{09B482E8-6E0E-1B4F-B1FD-C69DB9E858D9}" type="datetimeFigureOut">
               <a:rPr lang="en-US" smtClean="0"/>
               <a:pPr/>
-              <a:t>3/19/25</a:t>
+              <a:t>3/7/26</a:t>
             </a:fld>
             <a:endParaRPr lang="en-US" dirty="0"/>
           </a:p>
@@ -4795,7 +4795,7 @@
             <a:fld id="{09B482E8-6E0E-1B4F-B1FD-C69DB9E858D9}" type="datetimeFigureOut">
               <a:rPr lang="en-US" smtClean="0"/>
               <a:pPr/>
-              <a:t>3/19/25</a:t>
+              <a:t>3/7/26</a:t>
             </a:fld>
             <a:endParaRPr lang="en-US" dirty="0"/>
           </a:p>
@@ -5066,7 +5066,7 @@
             <a:fld id="{09B482E8-6E0E-1B4F-B1FD-C69DB9E858D9}" type="datetimeFigureOut">
               <a:rPr lang="en-US" smtClean="0"/>
               <a:pPr/>
-              <a:t>3/19/25</a:t>
+              <a:t>3/7/26</a:t>
             </a:fld>
             <a:endParaRPr lang="en-US" dirty="0"/>
           </a:p>
@@ -5264,6 +5264,13 @@
             <a:schemeClr val="lt1"/>
           </a:fontRef>
         </p:style>
+        <p:txBody>
+          <a:bodyPr/>
+          <a:lstStyle/>
+          <a:p>
+            <a:endParaRPr lang="en-US"/>
+          </a:p>
+        </p:txBody>
       </p:sp>
       <p:sp>
         <p:nvSpPr>
@@ -5302,6 +5309,13 @@
             <a:schemeClr val="lt1"/>
           </a:fontRef>
         </p:style>
+        <p:txBody>
+          <a:bodyPr/>
+          <a:lstStyle/>
+          <a:p>
+            <a:endParaRPr lang="en-US"/>
+          </a:p>
+        </p:txBody>
       </p:sp>
       <p:sp>
         <p:nvSpPr>
@@ -5396,7 +5410,7 @@
             <a:fld id="{09B482E8-6E0E-1B4F-B1FD-C69DB9E858D9}" type="datetimeFigureOut">
               <a:rPr lang="en-US" smtClean="0"/>
               <a:pPr/>
-              <a:t>3/19/25</a:t>
+              <a:t>3/7/26</a:t>
             </a:fld>
             <a:endParaRPr lang="en-US" dirty="0"/>
           </a:p>
@@ -5792,7 +5806,7 @@
             <a:fld id="{8DFA1846-DA80-1C48-A609-854EA85C59AD}" type="datetimeFigureOut">
               <a:rPr lang="en-US" smtClean="0"/>
               <a:pPr/>
-              <a:t>3/19/25</a:t>
+              <a:t>3/7/26</a:t>
             </a:fld>
             <a:endParaRPr lang="en-US" dirty="0"/>
           </a:p>
@@ -6175,7 +6189,7 @@
             <a:fld id="{09B482E8-6E0E-1B4F-B1FD-C69DB9E858D9}" type="datetimeFigureOut">
               <a:rPr lang="en-US" smtClean="0"/>
               <a:pPr/>
-              <a:t>3/19/25</a:t>
+              <a:t>3/7/26</a:t>
             </a:fld>
             <a:endParaRPr lang="en-US" dirty="0"/>
           </a:p>
@@ -6688,7 +6702,7 @@
             <a:fld id="{09B482E8-6E0E-1B4F-B1FD-C69DB9E858D9}" type="datetimeFigureOut">
               <a:rPr lang="en-US" smtClean="0"/>
               <a:pPr/>
-              <a:t>3/19/25</a:t>
+              <a:t>3/7/26</a:t>
             </a:fld>
             <a:endParaRPr lang="en-US" dirty="0"/>
           </a:p>
@@ -6872,6 +6886,13 @@
             <a:schemeClr val="lt1"/>
           </a:fontRef>
         </p:style>
+        <p:txBody>
+          <a:bodyPr/>
+          <a:lstStyle/>
+          <a:p>
+            <a:endParaRPr lang="en-US"/>
+          </a:p>
+        </p:txBody>
       </p:sp>
       <p:sp>
         <p:nvSpPr>
@@ -6910,6 +6931,13 @@
             <a:schemeClr val="lt1"/>
           </a:fontRef>
         </p:style>
+        <p:txBody>
+          <a:bodyPr/>
+          <a:lstStyle/>
+          <a:p>
+            <a:endParaRPr lang="en-US"/>
+          </a:p>
+        </p:txBody>
       </p:sp>
       <p:sp>
         <p:nvSpPr>
@@ -6952,7 +6980,7 @@
             <a:fld id="{F13A34C8-038E-2045-AF43-DF7DBB8E0E9E}" type="datetimeFigureOut">
               <a:rPr lang="en-US" smtClean="0"/>
               <a:pPr/>
-              <a:t>3/19/25</a:t>
+              <a:t>3/7/26</a:t>
             </a:fld>
             <a:endParaRPr lang="en-US" dirty="0"/>
           </a:p>
@@ -7103,6 +7131,13 @@
             <a:schemeClr val="lt1"/>
           </a:fontRef>
         </p:style>
+        <p:txBody>
+          <a:bodyPr/>
+          <a:lstStyle/>
+          <a:p>
+            <a:endParaRPr lang="en-US"/>
+          </a:p>
+        </p:txBody>
       </p:sp>
       <p:sp>
         <p:nvSpPr>
@@ -7122,7 +7157,7 @@
             <a:fld id="{8818C68F-D26B-8F47-958C-23B49CF8A634}" type="datetimeFigureOut">
               <a:rPr lang="en-US" smtClean="0"/>
               <a:pPr/>
-              <a:t>3/19/25</a:t>
+              <a:t>3/7/26</a:t>
             </a:fld>
             <a:endParaRPr lang="en-US" dirty="0"/>
           </a:p>
@@ -7519,7 +7554,7 @@
             <a:fld id="{09B482E8-6E0E-1B4F-B1FD-C69DB9E858D9}" type="datetimeFigureOut">
               <a:rPr lang="en-US" smtClean="0"/>
               <a:pPr/>
-              <a:t>3/19/25</a:t>
+              <a:t>3/7/26</a:t>
             </a:fld>
             <a:endParaRPr lang="en-US" dirty="0"/>
           </a:p>
@@ -7935,7 +7970,7 @@
             <a:fld id="{09B482E8-6E0E-1B4F-B1FD-C69DB9E858D9}" type="datetimeFigureOut">
               <a:rPr lang="en-US" smtClean="0"/>
               <a:pPr/>
-              <a:t>3/19/25</a:t>
+              <a:t>3/7/26</a:t>
             </a:fld>
             <a:endParaRPr lang="en-US" dirty="0"/>
           </a:p>
@@ -8186,7 +8221,7 @@
             <a:fld id="{09B482E8-6E0E-1B4F-B1FD-C69DB9E858D9}" type="datetimeFigureOut">
               <a:rPr lang="en-US" smtClean="0"/>
               <a:pPr/>
-              <a:t>3/19/25</a:t>
+              <a:t>3/7/26</a:t>
             </a:fld>
             <a:endParaRPr lang="en-US" dirty="0"/>
           </a:p>
@@ -8623,14 +8658,14 @@
           <a:noFill/>
           <a:extLst>
             <a:ext uri="{909E8E84-426E-40dd-AFC4-6F175D3DCCD1}">
-              <a14:hiddenFill xmlns="" xmlns:a14="http://schemas.microsoft.com/office/drawing/2010/main">
+              <a14:hiddenFill xmlns:a14="http://schemas.microsoft.com/office/drawing/2010/main" xmlns="">
                 <a:solidFill>
                   <a:srgbClr val="FFFFFF"/>
                 </a:solidFill>
               </a14:hiddenFill>
             </a:ext>
             <a:ext uri="{91240B29-F687-4f45-9708-019B960494DF}">
-              <a14:hiddenLine xmlns="" xmlns:a14="http://schemas.microsoft.com/office/drawing/2010/main" w="9525">
+              <a14:hiddenLine xmlns:a14="http://schemas.microsoft.com/office/drawing/2010/main" xmlns="" w="9525">
                 <a:solidFill>
                   <a:srgbClr val="000000"/>
                 </a:solidFill>
@@ -8838,7 +8873,7 @@
               <a:rPr kumimoji="1" lang="en-US" sz="3200" dirty="0">
                 <a:cs typeface="+mn-cs"/>
               </a:rPr>
-              <a:t>Chapter 8.3 </a:t>
+              <a:t>Topic 8.3 </a:t>
             </a:r>
           </a:p>
           <a:p>
@@ -8895,14 +8930,14 @@
           </a:ln>
           <a:extLst>
             <a:ext uri="{909E8E84-426E-40dd-AFC4-6F175D3DCCD1}">
-              <a14:hiddenFill xmlns="" xmlns:a14="http://schemas.microsoft.com/office/drawing/2010/main">
+              <a14:hiddenFill xmlns:a14="http://schemas.microsoft.com/office/drawing/2010/main" xmlns="">
                 <a:solidFill>
                   <a:srgbClr val="FFFFFF"/>
                 </a:solidFill>
               </a14:hiddenFill>
             </a:ext>
             <a:ext uri="{91240B29-F687-4f45-9708-019B960494DF}">
-              <a14:hiddenLine xmlns="" xmlns:a14="http://schemas.microsoft.com/office/drawing/2010/main" w="9525">
+              <a14:hiddenLine xmlns:a14="http://schemas.microsoft.com/office/drawing/2010/main" xmlns="" w="9525">
                 <a:solidFill>
                   <a:srgbClr val="000000"/>
                 </a:solidFill>
@@ -8953,14 +8988,14 @@
           <a:noFill/>
           <a:extLst>
             <a:ext uri="{909E8E84-426E-40dd-AFC4-6F175D3DCCD1}">
-              <a14:hiddenFill xmlns="" xmlns:a14="http://schemas.microsoft.com/office/drawing/2010/main">
+              <a14:hiddenFill xmlns:a14="http://schemas.microsoft.com/office/drawing/2010/main" xmlns="">
                 <a:solidFill>
                   <a:srgbClr val="FFFFFF"/>
                 </a:solidFill>
               </a14:hiddenFill>
             </a:ext>
             <a:ext uri="{91240B29-F687-4f45-9708-019B960494DF}">
-              <a14:hiddenLine xmlns="" xmlns:a14="http://schemas.microsoft.com/office/drawing/2010/main" w="9525">
+              <a14:hiddenLine xmlns:a14="http://schemas.microsoft.com/office/drawing/2010/main" xmlns="" w="9525">
                 <a:solidFill>
                   <a:srgbClr val="000000"/>
                 </a:solidFill>
@@ -9107,8 +9142,8 @@
         </p:nvSpPr>
         <p:spPr bwMode="auto">
           <a:xfrm>
-            <a:off x="2164347" y="2026377"/>
-            <a:ext cx="8255001" cy="1815882"/>
+            <a:off x="450761" y="2061646"/>
+            <a:ext cx="10702343" cy="1815882"/>
           </a:xfrm>
           <a:prstGeom prst="rect">
             <a:avLst/>
@@ -9131,7 +9166,13 @@
             </a:r>
             <a:r>
               <a:rPr lang="en-IE" sz="2800" dirty="0"/>
-              <a:t>takes a function and two lists as parameters and then joins the two lists by applying the function between corresponding elements. Here's how we'll implement it*:</a:t>
+              <a:t>takes a function and two lists as parameters and then joins the two lists by applying the function between corresponding elements. </a:t>
+            </a:r>
+          </a:p>
+          <a:p>
+            <a:r>
+              <a:rPr lang="en-IE" sz="2800" dirty="0"/>
+              <a:t>Here's how we'll implement it:</a:t>
             </a:r>
           </a:p>
         </p:txBody>
@@ -9722,7 +9763,7 @@
                             </p:stCondLst>
                             <p:childTnLst>
                               <p:par>
-                                <p:cTn id="11" presetID="2" presetClass="entr" presetSubtype="4" fill="hold" grpId="0" nodeType="clickEffect">
+                                <p:cTn id="11" presetID="2" presetClass="entr" presetSubtype="4" fill="hold" nodeType="clickEffect">
                                   <p:stCondLst>
                                     <p:cond delay="0"/>
                                   </p:stCondLst>
@@ -9730,6 +9771,109 @@
                                     <p:set>
                                       <p:cBhvr>
                                         <p:cTn id="12" dur="1" fill="hold">
+                                          <p:stCondLst>
+                                            <p:cond delay="0"/>
+                                          </p:stCondLst>
+                                        </p:cTn>
+                                        <p:tgtEl>
+                                          <p:spTgt spid="5">
+                                            <p:txEl>
+                                              <p:pRg st="1" end="1"/>
+                                            </p:txEl>
+                                          </p:spTgt>
+                                        </p:tgtEl>
+                                        <p:attrNameLst>
+                                          <p:attrName>style.visibility</p:attrName>
+                                        </p:attrNameLst>
+                                      </p:cBhvr>
+                                      <p:to>
+                                        <p:strVal val="visible"/>
+                                      </p:to>
+                                    </p:set>
+                                    <p:anim calcmode="lin" valueType="num">
+                                      <p:cBhvr additive="base">
+                                        <p:cTn id="13" dur="500" fill="hold"/>
+                                        <p:tgtEl>
+                                          <p:spTgt spid="5">
+                                            <p:txEl>
+                                              <p:pRg st="1" end="1"/>
+                                            </p:txEl>
+                                          </p:spTgt>
+                                        </p:tgtEl>
+                                        <p:attrNameLst>
+                                          <p:attrName>ppt_x</p:attrName>
+                                        </p:attrNameLst>
+                                      </p:cBhvr>
+                                      <p:tavLst>
+                                        <p:tav tm="0">
+                                          <p:val>
+                                            <p:strVal val="#ppt_x"/>
+                                          </p:val>
+                                        </p:tav>
+                                        <p:tav tm="100000">
+                                          <p:val>
+                                            <p:strVal val="#ppt_x"/>
+                                          </p:val>
+                                        </p:tav>
+                                      </p:tavLst>
+                                    </p:anim>
+                                    <p:anim calcmode="lin" valueType="num">
+                                      <p:cBhvr additive="base">
+                                        <p:cTn id="14" dur="500" fill="hold"/>
+                                        <p:tgtEl>
+                                          <p:spTgt spid="5">
+                                            <p:txEl>
+                                              <p:pRg st="1" end="1"/>
+                                            </p:txEl>
+                                          </p:spTgt>
+                                        </p:tgtEl>
+                                        <p:attrNameLst>
+                                          <p:attrName>ppt_y</p:attrName>
+                                        </p:attrNameLst>
+                                      </p:cBhvr>
+                                      <p:tavLst>
+                                        <p:tav tm="0">
+                                          <p:val>
+                                            <p:strVal val="1+#ppt_h/2"/>
+                                          </p:val>
+                                        </p:tav>
+                                        <p:tav tm="100000">
+                                          <p:val>
+                                            <p:strVal val="#ppt_y"/>
+                                          </p:val>
+                                        </p:tav>
+                                      </p:tavLst>
+                                    </p:anim>
+                                  </p:childTnLst>
+                                </p:cTn>
+                              </p:par>
+                            </p:childTnLst>
+                          </p:cTn>
+                        </p:par>
+                      </p:childTnLst>
+                    </p:cTn>
+                  </p:par>
+                  <p:par>
+                    <p:cTn id="15" fill="hold">
+                      <p:stCondLst>
+                        <p:cond delay="indefinite"/>
+                      </p:stCondLst>
+                      <p:childTnLst>
+                        <p:par>
+                          <p:cTn id="16" fill="hold">
+                            <p:stCondLst>
+                              <p:cond delay="0"/>
+                            </p:stCondLst>
+                            <p:childTnLst>
+                              <p:par>
+                                <p:cTn id="17" presetID="2" presetClass="entr" presetSubtype="4" fill="hold" grpId="0" nodeType="clickEffect">
+                                  <p:stCondLst>
+                                    <p:cond delay="0"/>
+                                  </p:stCondLst>
+                                  <p:childTnLst>
+                                    <p:set>
+                                      <p:cBhvr>
+                                        <p:cTn id="18" dur="1" fill="hold">
                                           <p:stCondLst>
                                             <p:cond delay="0"/>
                                           </p:stCondLst>
@@ -9747,7 +9891,7 @@
                                     </p:set>
                                     <p:anim calcmode="lin" valueType="num">
                                       <p:cBhvr additive="base">
-                                        <p:cTn id="13" dur="500" fill="hold"/>
+                                        <p:cTn id="19" dur="500" fill="hold"/>
                                         <p:tgtEl>
                                           <p:spTgt spid="7"/>
                                         </p:tgtEl>
@@ -9770,7 +9914,7 @@
                                     </p:anim>
                                     <p:anim calcmode="lin" valueType="num">
                                       <p:cBhvr additive="base">
-                                        <p:cTn id="14" dur="500" fill="hold"/>
+                                        <p:cTn id="20" dur="500" fill="hold"/>
                                         <p:tgtEl>
                                           <p:spTgt spid="7"/>
                                         </p:tgtEl>
@@ -9859,14 +10003,14 @@
           <a:noFill/>
           <a:extLst>
             <a:ext uri="{909E8E84-426E-40dd-AFC4-6F175D3DCCD1}">
-              <a14:hiddenFill xmlns:a14="http://schemas.microsoft.com/office/drawing/2010/main" xmlns="">
+              <a14:hiddenFill xmlns="" xmlns:a14="http://schemas.microsoft.com/office/drawing/2010/main">
                 <a:solidFill>
                   <a:srgbClr val="FFFFFF"/>
                 </a:solidFill>
               </a14:hiddenFill>
             </a:ext>
             <a:ext uri="{91240B29-F687-4f45-9708-019B960494DF}">
-              <a14:hiddenLine xmlns:a14="http://schemas.microsoft.com/office/drawing/2010/main" xmlns="" w="9525">
+              <a14:hiddenLine xmlns="" xmlns:a14="http://schemas.microsoft.com/office/drawing/2010/main" w="9525">
                 <a:solidFill>
                   <a:srgbClr val="000000"/>
                 </a:solidFill>
@@ -11123,14 +11267,14 @@
           <a:noFill/>
           <a:extLst>
             <a:ext uri="{909E8E84-426E-40dd-AFC4-6F175D3DCCD1}">
-              <a14:hiddenFill xmlns="" xmlns:a14="http://schemas.microsoft.com/office/drawing/2010/main">
+              <a14:hiddenFill xmlns:a14="http://schemas.microsoft.com/office/drawing/2010/main" xmlns="">
                 <a:solidFill>
                   <a:srgbClr val="FFFFFF"/>
                 </a:solidFill>
               </a14:hiddenFill>
             </a:ext>
             <a:ext uri="{91240B29-F687-4f45-9708-019B960494DF}">
-              <a14:hiddenLine xmlns="" xmlns:a14="http://schemas.microsoft.com/office/drawing/2010/main" w="9525">
+              <a14:hiddenLine xmlns:a14="http://schemas.microsoft.com/office/drawing/2010/main" xmlns="" w="9525">
                 <a:solidFill>
                   <a:srgbClr val="000000"/>
                 </a:solidFill>
@@ -12413,14 +12557,14 @@
           <a:noFill/>
           <a:extLst>
             <a:ext uri="{909E8E84-426E-40dd-AFC4-6F175D3DCCD1}">
-              <a14:hiddenFill xmlns:a14="http://schemas.microsoft.com/office/drawing/2010/main" xmlns="">
+              <a14:hiddenFill xmlns="" xmlns:a14="http://schemas.microsoft.com/office/drawing/2010/main">
                 <a:solidFill>
                   <a:srgbClr val="FFFFFF"/>
                 </a:solidFill>
               </a14:hiddenFill>
             </a:ext>
             <a:ext uri="{91240B29-F687-4f45-9708-019B960494DF}">
-              <a14:hiddenLine xmlns:a14="http://schemas.microsoft.com/office/drawing/2010/main" xmlns="" w="9525">
+              <a14:hiddenLine xmlns="" xmlns:a14="http://schemas.microsoft.com/office/drawing/2010/main" w="9525">
                 <a:solidFill>
                   <a:srgbClr val="000000"/>
                 </a:solidFill>
@@ -13054,7 +13198,7 @@
                             </p:stCondLst>
                             <p:childTnLst>
                               <p:par>
-                                <p:cTn id="5" presetID="2" presetClass="entr" presetSubtype="4" fill="hold" nodeType="clickEffect">
+                                <p:cTn id="5" presetID="2" presetClass="entr" presetSubtype="4" fill="hold" grpId="0" nodeType="clickEffect">
                                   <p:stCondLst>
                                     <p:cond delay="0"/>
                                   </p:stCondLst>
@@ -13062,6 +13206,85 @@
                                     <p:set>
                                       <p:cBhvr>
                                         <p:cTn id="6" dur="1" fill="hold">
+                                          <p:stCondLst>
+                                            <p:cond delay="0"/>
+                                          </p:stCondLst>
+                                        </p:cTn>
+                                        <p:tgtEl>
+                                          <p:spTgt spid="4">
+                                            <p:bg/>
+                                          </p:spTgt>
+                                        </p:tgtEl>
+                                        <p:attrNameLst>
+                                          <p:attrName>style.visibility</p:attrName>
+                                        </p:attrNameLst>
+                                      </p:cBhvr>
+                                      <p:to>
+                                        <p:strVal val="visible"/>
+                                      </p:to>
+                                    </p:set>
+                                    <p:anim calcmode="lin" valueType="num">
+                                      <p:cBhvr additive="base">
+                                        <p:cTn id="7" dur="500" fill="hold"/>
+                                        <p:tgtEl>
+                                          <p:spTgt spid="4">
+                                            <p:bg/>
+                                          </p:spTgt>
+                                        </p:tgtEl>
+                                        <p:attrNameLst>
+                                          <p:attrName>ppt_x</p:attrName>
+                                        </p:attrNameLst>
+                                      </p:cBhvr>
+                                      <p:tavLst>
+                                        <p:tav tm="0">
+                                          <p:val>
+                                            <p:strVal val="#ppt_x"/>
+                                          </p:val>
+                                        </p:tav>
+                                        <p:tav tm="100000">
+                                          <p:val>
+                                            <p:strVal val="#ppt_x"/>
+                                          </p:val>
+                                        </p:tav>
+                                      </p:tavLst>
+                                    </p:anim>
+                                    <p:anim calcmode="lin" valueType="num">
+                                      <p:cBhvr additive="base">
+                                        <p:cTn id="8" dur="500" fill="hold"/>
+                                        <p:tgtEl>
+                                          <p:spTgt spid="4">
+                                            <p:bg/>
+                                          </p:spTgt>
+                                        </p:tgtEl>
+                                        <p:attrNameLst>
+                                          <p:attrName>ppt_y</p:attrName>
+                                        </p:attrNameLst>
+                                      </p:cBhvr>
+                                      <p:tavLst>
+                                        <p:tav tm="0">
+                                          <p:val>
+                                            <p:strVal val="1+#ppt_h/2"/>
+                                          </p:val>
+                                        </p:tav>
+                                        <p:tav tm="100000">
+                                          <p:val>
+                                            <p:strVal val="#ppt_y"/>
+                                          </p:val>
+                                        </p:tav>
+                                      </p:tavLst>
+                                    </p:anim>
+                                  </p:childTnLst>
+                                </p:cTn>
+                              </p:par>
+                              <p:par>
+                                <p:cTn id="9" presetID="2" presetClass="entr" presetSubtype="4" fill="hold" grpId="0" nodeType="withEffect">
+                                  <p:stCondLst>
+                                    <p:cond delay="0"/>
+                                  </p:stCondLst>
+                                  <p:childTnLst>
+                                    <p:set>
+                                      <p:cBhvr>
+                                        <p:cTn id="10" dur="1" fill="hold">
                                           <p:stCondLst>
                                             <p:cond delay="0"/>
                                           </p:stCondLst>
@@ -13083,7 +13306,7 @@
                                     </p:set>
                                     <p:anim calcmode="lin" valueType="num">
                                       <p:cBhvr additive="base">
-                                        <p:cTn id="7" dur="500" fill="hold"/>
+                                        <p:cTn id="11" dur="500" fill="hold"/>
                                         <p:tgtEl>
                                           <p:spTgt spid="4">
                                             <p:txEl>
@@ -13110,7 +13333,7 @@
                                     </p:anim>
                                     <p:anim calcmode="lin" valueType="num">
                                       <p:cBhvr additive="base">
-                                        <p:cTn id="8" dur="500" fill="hold"/>
+                                        <p:cTn id="12" dur="500" fill="hold"/>
                                         <p:tgtEl>
                                           <p:spTgt spid="4">
                                             <p:txEl>
@@ -13145,26 +13368,26 @@
                     </p:cTn>
                   </p:par>
                   <p:par>
-                    <p:cTn id="9" fill="hold">
+                    <p:cTn id="13" fill="hold">
                       <p:stCondLst>
                         <p:cond delay="indefinite"/>
                       </p:stCondLst>
                       <p:childTnLst>
                         <p:par>
-                          <p:cTn id="10" fill="hold">
+                          <p:cTn id="14" fill="hold">
                             <p:stCondLst>
                               <p:cond delay="0"/>
                             </p:stCondLst>
                             <p:childTnLst>
                               <p:par>
-                                <p:cTn id="11" presetID="2" presetClass="entr" presetSubtype="4" fill="hold" nodeType="clickEffect">
+                                <p:cTn id="15" presetID="2" presetClass="entr" presetSubtype="4" fill="hold" grpId="0" nodeType="clickEffect">
                                   <p:stCondLst>
                                     <p:cond delay="0"/>
                                   </p:stCondLst>
                                   <p:childTnLst>
                                     <p:set>
                                       <p:cBhvr>
-                                        <p:cTn id="12" dur="1" fill="hold">
+                                        <p:cTn id="16" dur="1" fill="hold">
                                           <p:stCondLst>
                                             <p:cond delay="0"/>
                                           </p:stCondLst>
@@ -13186,7 +13409,7 @@
                                     </p:set>
                                     <p:anim calcmode="lin" valueType="num">
                                       <p:cBhvr additive="base">
-                                        <p:cTn id="13" dur="500" fill="hold"/>
+                                        <p:cTn id="17" dur="500" fill="hold"/>
                                         <p:tgtEl>
                                           <p:spTgt spid="4">
                                             <p:txEl>
@@ -13213,7 +13436,7 @@
                                     </p:anim>
                                     <p:anim calcmode="lin" valueType="num">
                                       <p:cBhvr additive="base">
-                                        <p:cTn id="14" dur="500" fill="hold"/>
+                                        <p:cTn id="18" dur="500" fill="hold"/>
                                         <p:tgtEl>
                                           <p:spTgt spid="4">
                                             <p:txEl>
@@ -13248,26 +13471,26 @@
                     </p:cTn>
                   </p:par>
                   <p:par>
-                    <p:cTn id="15" fill="hold">
+                    <p:cTn id="19" fill="hold">
                       <p:stCondLst>
                         <p:cond delay="indefinite"/>
                       </p:stCondLst>
                       <p:childTnLst>
                         <p:par>
-                          <p:cTn id="16" fill="hold">
+                          <p:cTn id="20" fill="hold">
                             <p:stCondLst>
                               <p:cond delay="0"/>
                             </p:stCondLst>
                             <p:childTnLst>
                               <p:par>
-                                <p:cTn id="17" presetID="2" presetClass="entr" presetSubtype="4" fill="hold" nodeType="clickEffect">
+                                <p:cTn id="21" presetID="2" presetClass="entr" presetSubtype="4" fill="hold" grpId="0" nodeType="clickEffect">
                                   <p:stCondLst>
                                     <p:cond delay="0"/>
                                   </p:stCondLst>
                                   <p:childTnLst>
                                     <p:set>
                                       <p:cBhvr>
-                                        <p:cTn id="18" dur="1" fill="hold">
+                                        <p:cTn id="22" dur="1" fill="hold">
                                           <p:stCondLst>
                                             <p:cond delay="0"/>
                                           </p:stCondLst>
@@ -13289,7 +13512,7 @@
                                     </p:set>
                                     <p:anim calcmode="lin" valueType="num">
                                       <p:cBhvr additive="base">
-                                        <p:cTn id="19" dur="500" fill="hold"/>
+                                        <p:cTn id="23" dur="500" fill="hold"/>
                                         <p:tgtEl>
                                           <p:spTgt spid="4">
                                             <p:txEl>
@@ -13316,7 +13539,7 @@
                                     </p:anim>
                                     <p:anim calcmode="lin" valueType="num">
                                       <p:cBhvr additive="base">
-                                        <p:cTn id="20" dur="500" fill="hold"/>
+                                        <p:cTn id="24" dur="500" fill="hold"/>
                                         <p:tgtEl>
                                           <p:spTgt spid="4">
                                             <p:txEl>
@@ -13371,6 +13594,9 @@
         </p:cTn>
       </p:par>
     </p:tnLst>
+    <p:bldLst>
+      <p:bldP spid="4" grpId="0" uiExpand="1" build="allAtOnce" animBg="1"/>
+    </p:bldLst>
   </p:timing>
 </p:sld>
 </file>
@@ -13934,7 +14160,7 @@
                             </p:stCondLst>
                             <p:childTnLst>
                               <p:par>
-                                <p:cTn id="5" presetID="2" presetClass="entr" presetSubtype="4" fill="hold" nodeType="clickEffect">
+                                <p:cTn id="5" presetID="2" presetClass="entr" presetSubtype="4" fill="hold" grpId="0" nodeType="clickEffect">
                                   <p:stCondLst>
                                     <p:cond delay="0"/>
                                   </p:stCondLst>
@@ -13942,6 +14168,85 @@
                                     <p:set>
                                       <p:cBhvr>
                                         <p:cTn id="6" dur="1" fill="hold">
+                                          <p:stCondLst>
+                                            <p:cond delay="0"/>
+                                          </p:stCondLst>
+                                        </p:cTn>
+                                        <p:tgtEl>
+                                          <p:spTgt spid="4">
+                                            <p:bg/>
+                                          </p:spTgt>
+                                        </p:tgtEl>
+                                        <p:attrNameLst>
+                                          <p:attrName>style.visibility</p:attrName>
+                                        </p:attrNameLst>
+                                      </p:cBhvr>
+                                      <p:to>
+                                        <p:strVal val="visible"/>
+                                      </p:to>
+                                    </p:set>
+                                    <p:anim calcmode="lin" valueType="num">
+                                      <p:cBhvr additive="base">
+                                        <p:cTn id="7" dur="500" fill="hold"/>
+                                        <p:tgtEl>
+                                          <p:spTgt spid="4">
+                                            <p:bg/>
+                                          </p:spTgt>
+                                        </p:tgtEl>
+                                        <p:attrNameLst>
+                                          <p:attrName>ppt_x</p:attrName>
+                                        </p:attrNameLst>
+                                      </p:cBhvr>
+                                      <p:tavLst>
+                                        <p:tav tm="0">
+                                          <p:val>
+                                            <p:strVal val="#ppt_x"/>
+                                          </p:val>
+                                        </p:tav>
+                                        <p:tav tm="100000">
+                                          <p:val>
+                                            <p:strVal val="#ppt_x"/>
+                                          </p:val>
+                                        </p:tav>
+                                      </p:tavLst>
+                                    </p:anim>
+                                    <p:anim calcmode="lin" valueType="num">
+                                      <p:cBhvr additive="base">
+                                        <p:cTn id="8" dur="500" fill="hold"/>
+                                        <p:tgtEl>
+                                          <p:spTgt spid="4">
+                                            <p:bg/>
+                                          </p:spTgt>
+                                        </p:tgtEl>
+                                        <p:attrNameLst>
+                                          <p:attrName>ppt_y</p:attrName>
+                                        </p:attrNameLst>
+                                      </p:cBhvr>
+                                      <p:tavLst>
+                                        <p:tav tm="0">
+                                          <p:val>
+                                            <p:strVal val="1+#ppt_h/2"/>
+                                          </p:val>
+                                        </p:tav>
+                                        <p:tav tm="100000">
+                                          <p:val>
+                                            <p:strVal val="#ppt_y"/>
+                                          </p:val>
+                                        </p:tav>
+                                      </p:tavLst>
+                                    </p:anim>
+                                  </p:childTnLst>
+                                </p:cTn>
+                              </p:par>
+                              <p:par>
+                                <p:cTn id="9" presetID="2" presetClass="entr" presetSubtype="4" fill="hold" grpId="0" nodeType="withEffect">
+                                  <p:stCondLst>
+                                    <p:cond delay="0"/>
+                                  </p:stCondLst>
+                                  <p:childTnLst>
+                                    <p:set>
+                                      <p:cBhvr>
+                                        <p:cTn id="10" dur="1" fill="hold">
                                           <p:stCondLst>
                                             <p:cond delay="0"/>
                                           </p:stCondLst>
@@ -13963,7 +14268,7 @@
                                     </p:set>
                                     <p:anim calcmode="lin" valueType="num">
                                       <p:cBhvr additive="base">
-                                        <p:cTn id="7" dur="500" fill="hold"/>
+                                        <p:cTn id="11" dur="500" fill="hold"/>
                                         <p:tgtEl>
                                           <p:spTgt spid="4">
                                             <p:txEl>
@@ -13990,7 +14295,7 @@
                                     </p:anim>
                                     <p:anim calcmode="lin" valueType="num">
                                       <p:cBhvr additive="base">
-                                        <p:cTn id="8" dur="500" fill="hold"/>
+                                        <p:cTn id="12" dur="500" fill="hold"/>
                                         <p:tgtEl>
                                           <p:spTgt spid="4">
                                             <p:txEl>
@@ -14025,26 +14330,26 @@
                     </p:cTn>
                   </p:par>
                   <p:par>
-                    <p:cTn id="9" fill="hold">
+                    <p:cTn id="13" fill="hold">
                       <p:stCondLst>
                         <p:cond delay="indefinite"/>
                       </p:stCondLst>
                       <p:childTnLst>
                         <p:par>
-                          <p:cTn id="10" fill="hold">
+                          <p:cTn id="14" fill="hold">
                             <p:stCondLst>
                               <p:cond delay="0"/>
                             </p:stCondLst>
                             <p:childTnLst>
                               <p:par>
-                                <p:cTn id="11" presetID="2" presetClass="entr" presetSubtype="4" fill="hold" nodeType="clickEffect">
+                                <p:cTn id="15" presetID="2" presetClass="entr" presetSubtype="4" fill="hold" grpId="0" nodeType="clickEffect">
                                   <p:stCondLst>
                                     <p:cond delay="0"/>
                                   </p:stCondLst>
                                   <p:childTnLst>
                                     <p:set>
                                       <p:cBhvr>
-                                        <p:cTn id="12" dur="1" fill="hold">
+                                        <p:cTn id="16" dur="1" fill="hold">
                                           <p:stCondLst>
                                             <p:cond delay="0"/>
                                           </p:stCondLst>
@@ -14066,7 +14371,7 @@
                                     </p:set>
                                     <p:anim calcmode="lin" valueType="num">
                                       <p:cBhvr additive="base">
-                                        <p:cTn id="13" dur="500" fill="hold"/>
+                                        <p:cTn id="17" dur="500" fill="hold"/>
                                         <p:tgtEl>
                                           <p:spTgt spid="4">
                                             <p:txEl>
@@ -14093,7 +14398,7 @@
                                     </p:anim>
                                     <p:anim calcmode="lin" valueType="num">
                                       <p:cBhvr additive="base">
-                                        <p:cTn id="14" dur="500" fill="hold"/>
+                                        <p:cTn id="18" dur="500" fill="hold"/>
                                         <p:tgtEl>
                                           <p:spTgt spid="4">
                                             <p:txEl>
@@ -14128,26 +14433,26 @@
                     </p:cTn>
                   </p:par>
                   <p:par>
-                    <p:cTn id="15" fill="hold">
+                    <p:cTn id="19" fill="hold">
                       <p:stCondLst>
                         <p:cond delay="indefinite"/>
                       </p:stCondLst>
                       <p:childTnLst>
                         <p:par>
-                          <p:cTn id="16" fill="hold">
+                          <p:cTn id="20" fill="hold">
                             <p:stCondLst>
                               <p:cond delay="0"/>
                             </p:stCondLst>
                             <p:childTnLst>
                               <p:par>
-                                <p:cTn id="17" presetID="2" presetClass="entr" presetSubtype="4" fill="hold" nodeType="clickEffect">
+                                <p:cTn id="21" presetID="2" presetClass="entr" presetSubtype="4" fill="hold" grpId="0" nodeType="clickEffect">
                                   <p:stCondLst>
                                     <p:cond delay="0"/>
                                   </p:stCondLst>
                                   <p:childTnLst>
                                     <p:set>
                                       <p:cBhvr>
-                                        <p:cTn id="18" dur="1" fill="hold">
+                                        <p:cTn id="22" dur="1" fill="hold">
                                           <p:stCondLst>
                                             <p:cond delay="0"/>
                                           </p:stCondLst>
@@ -14169,7 +14474,7 @@
                                     </p:set>
                                     <p:anim calcmode="lin" valueType="num">
                                       <p:cBhvr additive="base">
-                                        <p:cTn id="19" dur="500" fill="hold"/>
+                                        <p:cTn id="23" dur="500" fill="hold"/>
                                         <p:tgtEl>
                                           <p:spTgt spid="4">
                                             <p:txEl>
@@ -14196,7 +14501,7 @@
                                     </p:anim>
                                     <p:anim calcmode="lin" valueType="num">
                                       <p:cBhvr additive="base">
-                                        <p:cTn id="20" dur="500" fill="hold"/>
+                                        <p:cTn id="24" dur="500" fill="hold"/>
                                         <p:tgtEl>
                                           <p:spTgt spid="4">
                                             <p:txEl>
@@ -14251,6 +14556,9 @@
         </p:cTn>
       </p:par>
     </p:tnLst>
+    <p:bldLst>
+      <p:bldP spid="4" grpId="0" uiExpand="1" build="allAtOnce" animBg="1"/>
+    </p:bldLst>
   </p:timing>
 </p:sld>
 </file>
